--- a/assets/pptx/catalog-792.pptx
+++ b/assets/pptx/catalog-792.pptx
@@ -3347,7 +3347,7 @@
                 <a:ea typeface="Ebrima"/>
                 <a:cs typeface="Ebrima"/>
               </a:rPr>
-              <a:t>ይከፈታል በፊቴ ያ ደጅ (2x)</a:t>
+              <a:t>ይከፈታል በፊቴ ያ ደጅ 2x</a:t>
             </a:r>
           </a:p>
         </p:txBody>
@@ -3481,7 +3481,7 @@
                 <a:ea typeface="Ebrima"/>
                 <a:cs typeface="Ebrima"/>
               </a:rPr>
-              <a:t>(4x)</a:t>
+              <a:t>4x</a:t>
             </a:r>
           </a:p>
         </p:txBody>
@@ -3615,7 +3615,7 @@
                 <a:ea typeface="Ebrima"/>
                 <a:cs typeface="Ebrima"/>
               </a:rPr>
-              <a:t>ከቦት የለም እሳቱ ማደሪያዬን (2x)</a:t>
+              <a:t>ከቦት የለም እሳቱ ማደሪያዬን 2x</a:t>
             </a:r>
           </a:p>
         </p:txBody>
@@ -3682,7 +3682,7 @@
                 <a:ea typeface="Ebrima"/>
                 <a:cs typeface="Ebrima"/>
               </a:rPr>
-              <a:t>ከቦት የለም እሳቱ ማደሪያዬን (4x)</a:t>
+              <a:t>ከቦት የለም እሳቱ ማደሪያዬን 4x</a:t>
             </a:r>
           </a:p>
         </p:txBody>
@@ -4151,7 +4151,7 @@
                 <a:ea typeface="Ebrima"/>
                 <a:cs typeface="Ebrima"/>
               </a:rPr>
-              <a:t>ይከፈታል በፊቴ ያ ደጅ (2x)</a:t>
+              <a:t>ይከፈታል በፊቴ ያ ደጅ 2x</a:t>
             </a:r>
           </a:p>
         </p:txBody>
@@ -4218,7 +4218,7 @@
                 <a:ea typeface="Ebrima"/>
                 <a:cs typeface="Ebrima"/>
               </a:rPr>
-              <a:t>ይከፈታል በፊቴ ያ ደጅ(4x)</a:t>
+              <a:t>ይከፈታል በፊቴ ያ ደጅ4x</a:t>
             </a:r>
           </a:p>
         </p:txBody>
@@ -4486,7 +4486,7 @@
                 <a:ea typeface="Ebrima"/>
                 <a:cs typeface="Ebrima"/>
               </a:rPr>
-              <a:t>የትንሳዔው ንጉስ የሱስ የኔ አለኝታ (2x)</a:t>
+              <a:t>የትንሳዔው ንጉስ የሱስ የኔ አለኝታ 2x</a:t>
             </a:r>
           </a:p>
         </p:txBody>
@@ -4620,7 +4620,7 @@
                 <a:ea typeface="Ebrima"/>
                 <a:cs typeface="Ebrima"/>
               </a:rPr>
-              <a:t>(2x)</a:t>
+              <a:t>2x</a:t>
             </a:r>
           </a:p>
         </p:txBody>
@@ -4687,7 +4687,7 @@
                 <a:ea typeface="Ebrima"/>
                 <a:cs typeface="Ebrima"/>
               </a:rPr>
-              <a:t>ይከፈታል በፊቴ ያ ደጅ (2x)</a:t>
+              <a:t>ይከፈታል በፊቴ ያ ደጅ 2x</a:t>
             </a:r>
           </a:p>
         </p:txBody>
@@ -4821,7 +4821,7 @@
                 <a:ea typeface="Ebrima"/>
                 <a:cs typeface="Ebrima"/>
               </a:rPr>
-              <a:t>አፈሰሰው ጌታዬ ቅባቱን (2x)</a:t>
+              <a:t>አፈሰሰው ጌታዬ ቅባቱን 2x</a:t>
             </a:r>
           </a:p>
         </p:txBody>
@@ -4888,7 +4888,7 @@
                 <a:ea typeface="Ebrima"/>
                 <a:cs typeface="Ebrima"/>
               </a:rPr>
-              <a:t>አፈሰሰው ጌታዬ ቅባቱን (4x)</a:t>
+              <a:t>አፈሰሰው ጌታዬ ቅባቱን 4x</a:t>
             </a:r>
           </a:p>
         </p:txBody>
@@ -5156,7 +5156,7 @@
                 <a:ea typeface="Ebrima"/>
                 <a:cs typeface="Ebrima"/>
               </a:rPr>
-              <a:t>የትንሳዔው ንጉስ የሱስ የኔ አለኝታ (2x)</a:t>
+              <a:t>የትንሳዔው ንጉስ የሱስ የኔ አለኝታ 2x</a:t>
             </a:r>
           </a:p>
         </p:txBody>
@@ -5223,7 +5223,7 @@
                 <a:ea typeface="Ebrima"/>
                 <a:cs typeface="Ebrima"/>
               </a:rPr>
-              <a:t>ክበር የኔ አለኝታ (የኔ አለኝታ)</a:t>
+              <a:t>ክበር የኔ አለኝታ የኔ አለኝታ</a:t>
             </a:r>
           </a:p>
         </p:txBody>
@@ -5290,7 +5290,7 @@
                 <a:ea typeface="Ebrima"/>
                 <a:cs typeface="Ebrima"/>
               </a:rPr>
-              <a:t>ክበር የኔ አለኝታ (ኦ የኔ አለኝታ)</a:t>
+              <a:t>ክበር የኔ አለኝታ ኦ የኔ አለኝታ</a:t>
             </a:r>
           </a:p>
         </p:txBody>
@@ -5357,7 +5357,7 @@
                 <a:ea typeface="Ebrima"/>
                 <a:cs typeface="Ebrima"/>
               </a:rPr>
-              <a:t>ክበር የኔ አለኝታ (ኢየሱስ የኔ ጌታ)</a:t>
+              <a:t>ክበር የኔ አለኝታ ኢየሱስ የኔ ጌታ</a:t>
             </a:r>
           </a:p>
         </p:txBody>
@@ -5491,7 +5491,7 @@
                 <a:ea typeface="Ebrima"/>
                 <a:cs typeface="Ebrima"/>
               </a:rPr>
-              <a:t>ክበር የኔ አለኝታ (ኦ የኔ አለኝታ)</a:t>
+              <a:t>ክበር የኔ አለኝታ ኦ የኔ አለኝታ</a:t>
             </a:r>
           </a:p>
         </p:txBody>
@@ -5558,7 +5558,7 @@
                 <a:ea typeface="Ebrima"/>
                 <a:cs typeface="Ebrima"/>
               </a:rPr>
-              <a:t>ክበር የኔ አለኝታ (ኢየሱስ የኔ አለኝታ)</a:t>
+              <a:t>ክበር የኔ አለኝታ ኢየሱስ የኔ አለኝታ</a:t>
             </a:r>
           </a:p>
         </p:txBody>
@@ -5625,7 +5625,7 @@
                 <a:ea typeface="Ebrima"/>
                 <a:cs typeface="Ebrima"/>
               </a:rPr>
-              <a:t>(4x)</a:t>
+              <a:t>4x</a:t>
             </a:r>
           </a:p>
         </p:txBody>
